--- a/AML_executive_summary_infographic.pptx
+++ b/AML_executive_summary_infographic.pptx
@@ -123,6 +123,35 @@
 </p:presentation>
 </file>
 
+<file path=ppt/changesInfos/changesInfo1.xml><?xml version="1.0" encoding="utf-8"?>
+<pc:chgInfo xmlns:a="http://schemas.openxmlformats.org/drawingml/2006/main" xmlns:r="http://schemas.openxmlformats.org/officeDocument/2006/relationships" xmlns:ac="http://schemas.microsoft.com/office/drawing/2013/main/command" xmlns:pc="http://schemas.microsoft.com/office/powerpoint/2013/main/command">
+  <pc:docChgLst>
+    <pc:chgData name="917036180999" userId="fc4bd521ffc22738" providerId="LiveId" clId="{5831FDA1-5D2E-45A0-813F-14BEC29C986F}"/>
+    <pc:docChg chg="modSld">
+      <pc:chgData name="917036180999" userId="fc4bd521ffc22738" providerId="LiveId" clId="{5831FDA1-5D2E-45A0-813F-14BEC29C986F}" dt="2026-05-07T12:25:20.574" v="13" actId="20577"/>
+      <pc:docMkLst>
+        <pc:docMk/>
+      </pc:docMkLst>
+      <pc:sldChg chg="modSp mod">
+        <pc:chgData name="917036180999" userId="fc4bd521ffc22738" providerId="LiveId" clId="{5831FDA1-5D2E-45A0-813F-14BEC29C986F}" dt="2026-05-07T12:25:20.574" v="13" actId="20577"/>
+        <pc:sldMkLst>
+          <pc:docMk/>
+          <pc:sldMk cId="0" sldId="256"/>
+        </pc:sldMkLst>
+        <pc:spChg chg="mod">
+          <ac:chgData name="917036180999" userId="fc4bd521ffc22738" providerId="LiveId" clId="{5831FDA1-5D2E-45A0-813F-14BEC29C986F}" dt="2026-05-07T12:25:20.574" v="13" actId="20577"/>
+          <ac:spMkLst>
+            <pc:docMk/>
+            <pc:sldMk cId="0" sldId="256"/>
+            <ac:spMk id="49" creationId="{00000000-0000-0000-0000-000000000000}"/>
+          </ac:spMkLst>
+        </pc:spChg>
+      </pc:sldChg>
+    </pc:docChg>
+  </pc:docChgLst>
+</pc:chgInfo>
+</file>
+
 <file path=ppt/slideLayouts/slideLayout1.xml><?xml version="1.0" encoding="utf-8"?>
 <p:sldLayout xmlns:a="http://schemas.openxmlformats.org/drawingml/2006/main" xmlns:r="http://schemas.openxmlformats.org/officeDocument/2006/relationships" xmlns:p="http://schemas.openxmlformats.org/presentationml/2006/main" type="title" preserve="1">
   <p:cSld name="Title Slide">
@@ -302,7 +331,7 @@
           <a:p>
             <a:fld id="{5BCAD085-E8A6-8845-BD4E-CB4CCA059FC4}" type="datetimeFigureOut">
               <a:rPr lang="en-US" smtClean="0"/>
-              <a:t>5/6/2026</a:t>
+              <a:t>5/7/2026</a:t>
             </a:fld>
             <a:endParaRPr lang="en-US"/>
           </a:p>
@@ -470,7 +499,7 @@
           <a:p>
             <a:fld id="{5BCAD085-E8A6-8845-BD4E-CB4CCA059FC4}" type="datetimeFigureOut">
               <a:rPr lang="en-US" smtClean="0"/>
-              <a:t>5/6/2026</a:t>
+              <a:t>5/7/2026</a:t>
             </a:fld>
             <a:endParaRPr lang="en-US"/>
           </a:p>
@@ -648,7 +677,7 @@
           <a:p>
             <a:fld id="{5BCAD085-E8A6-8845-BD4E-CB4CCA059FC4}" type="datetimeFigureOut">
               <a:rPr lang="en-US" smtClean="0"/>
-              <a:t>5/6/2026</a:t>
+              <a:t>5/7/2026</a:t>
             </a:fld>
             <a:endParaRPr lang="en-US"/>
           </a:p>
@@ -816,7 +845,7 @@
           <a:p>
             <a:fld id="{5BCAD085-E8A6-8845-BD4E-CB4CCA059FC4}" type="datetimeFigureOut">
               <a:rPr lang="en-US" smtClean="0"/>
-              <a:t>5/6/2026</a:t>
+              <a:t>5/7/2026</a:t>
             </a:fld>
             <a:endParaRPr lang="en-US"/>
           </a:p>
@@ -1061,7 +1090,7 @@
           <a:p>
             <a:fld id="{5BCAD085-E8A6-8845-BD4E-CB4CCA059FC4}" type="datetimeFigureOut">
               <a:rPr lang="en-US" smtClean="0"/>
-              <a:t>5/6/2026</a:t>
+              <a:t>5/7/2026</a:t>
             </a:fld>
             <a:endParaRPr lang="en-US"/>
           </a:p>
@@ -1346,7 +1375,7 @@
           <a:p>
             <a:fld id="{5BCAD085-E8A6-8845-BD4E-CB4CCA059FC4}" type="datetimeFigureOut">
               <a:rPr lang="en-US" smtClean="0"/>
-              <a:t>5/6/2026</a:t>
+              <a:t>5/7/2026</a:t>
             </a:fld>
             <a:endParaRPr lang="en-US"/>
           </a:p>
@@ -1765,7 +1794,7 @@
           <a:p>
             <a:fld id="{5BCAD085-E8A6-8845-BD4E-CB4CCA059FC4}" type="datetimeFigureOut">
               <a:rPr lang="en-US" smtClean="0"/>
-              <a:t>5/6/2026</a:t>
+              <a:t>5/7/2026</a:t>
             </a:fld>
             <a:endParaRPr lang="en-US"/>
           </a:p>
@@ -1882,7 +1911,7 @@
           <a:p>
             <a:fld id="{5BCAD085-E8A6-8845-BD4E-CB4CCA059FC4}" type="datetimeFigureOut">
               <a:rPr lang="en-US" smtClean="0"/>
-              <a:t>5/6/2026</a:t>
+              <a:t>5/7/2026</a:t>
             </a:fld>
             <a:endParaRPr lang="en-US"/>
           </a:p>
@@ -1977,7 +2006,7 @@
           <a:p>
             <a:fld id="{5BCAD085-E8A6-8845-BD4E-CB4CCA059FC4}" type="datetimeFigureOut">
               <a:rPr lang="en-US" smtClean="0"/>
-              <a:t>5/6/2026</a:t>
+              <a:t>5/7/2026</a:t>
             </a:fld>
             <a:endParaRPr lang="en-US"/>
           </a:p>
@@ -2252,7 +2281,7 @@
           <a:p>
             <a:fld id="{5BCAD085-E8A6-8845-BD4E-CB4CCA059FC4}" type="datetimeFigureOut">
               <a:rPr lang="en-US" smtClean="0"/>
-              <a:t>5/6/2026</a:t>
+              <a:t>5/7/2026</a:t>
             </a:fld>
             <a:endParaRPr lang="en-US"/>
           </a:p>
@@ -2504,7 +2533,7 @@
           <a:p>
             <a:fld id="{5BCAD085-E8A6-8845-BD4E-CB4CCA059FC4}" type="datetimeFigureOut">
               <a:rPr lang="en-US" smtClean="0"/>
-              <a:t>5/6/2026</a:t>
+              <a:t>5/7/2026</a:t>
             </a:fld>
             <a:endParaRPr lang="en-US"/>
           </a:p>
@@ -2715,7 +2744,7 @@
           <a:p>
             <a:fld id="{5BCAD085-E8A6-8845-BD4E-CB4CCA059FC4}" type="datetimeFigureOut">
               <a:rPr lang="en-US" smtClean="0"/>
-              <a:t>5/6/2026</a:t>
+              <a:t>5/7/2026</a:t>
             </a:fld>
             <a:endParaRPr lang="en-US"/>
           </a:p>
@@ -5287,16 +5316,7 @@
                   </a:solidFill>
                   <a:latin typeface="Calibri"/>
                 </a:rPr>
-                <a:t>R</a:t>
-              </a:r>
-              <a:r>
-                <a:rPr sz="1000" b="1" dirty="0" err="1">
-                  <a:solidFill>
-                    <a:srgbClr val="0F6E56"/>
-                  </a:solidFill>
-                  <a:latin typeface="Calibri"/>
-                </a:rPr>
-                <a:t>ecall</a:t>
+                <a:t>Accuracy</a:t>
               </a:r>
               <a:endParaRPr sz="1000" b="1" dirty="0">
                 <a:solidFill>
